--- a/이수혁/22일차/AGV 주행 및 안내 모드.pptx
+++ b/이수혁/22일차/AGV 주행 및 안내 모드.pptx
@@ -11216,7 +11216,7 @@
         </p:nvSpPr>
         <p:spPr>
           <a:xfrm>
-            <a:off x="1143000" y="5990629"/>
+            <a:off x="1143000" y="6012061"/>
             <a:ext cx="10277475" cy="407193"/>
           </a:xfrm>
           <a:prstGeom prst="rect">
@@ -11246,7 +11246,7 @@
               <a:buNone/>
             </a:pPr>
             <a:r>
-              <a:rPr lang="en-US" sz="1087" b="0" i="0" u="none" strike="noStrike" cap="none">
+              <a:rPr lang="en-US" sz="1087" b="0" i="0" u="none" strike="noStrike" cap="none" dirty="0" err="1">
                 <a:solidFill>
                   <a:srgbClr val="B0BEC5"/>
                 </a:solidFill>
@@ -11255,57 +11255,573 @@
                 <a:cs typeface="Malgun Gothic"/>
                 <a:sym typeface="Malgun Gothic"/>
               </a:rPr>
-              <a:t>자율주행 엔진이 한 번 출발하면 멈추기 힘든 단점을 해결하기 위해, 시스템 정지 요청이나 사람 유실 시 액션 클라이언트(self.cancel_current_goal)를 강제 개입시켜 언제든 로봇을 즉각 제동할 수 있도록 설계했습니다.</a:t>
+              <a:t>자율주행</a:t>
             </a:r>
-            <a:endParaRPr/>
-          </a:p>
-        </p:txBody>
-      </p:sp>
-      <p:sp>
-        <p:nvSpPr>
-          <p:cNvPr id="99" name="Google Shape;99;p13"/>
-          <p:cNvSpPr/>
-          <p:nvPr/>
-        </p:nvSpPr>
-        <p:spPr>
-          <a:xfrm>
-            <a:off x="485775" y="3688258"/>
-            <a:ext cx="2662237" cy="38100"/>
-          </a:xfrm>
-          <a:prstGeom prst="rect">
-            <a:avLst/>
-          </a:prstGeom>
-          <a:solidFill>
-            <a:srgbClr val="00C8FF"/>
-          </a:solidFill>
-          <a:ln>
-            <a:noFill/>
-          </a:ln>
-        </p:spPr>
-        <p:txBody>
-          <a:bodyPr spcFirstLastPara="1" wrap="square" lIns="91425" tIns="45700" rIns="91425" bIns="45700" anchor="ctr" anchorCtr="0">
-            <a:noAutofit/>
-          </a:bodyPr>
-          <a:lstStyle/>
-          <a:p>
-            <a:pPr marL="0" marR="0" lvl="0" indent="0" algn="ctr" rtl="0">
-              <a:spcBef>
-                <a:spcPts val="0"/>
-              </a:spcBef>
-              <a:spcAft>
-                <a:spcPts val="0"/>
-              </a:spcAft>
-              <a:buNone/>
-            </a:pPr>
-            <a:endParaRPr sz="1800" b="0" i="0" u="none" strike="noStrike" cap="none">
-              <a:solidFill>
-                <a:schemeClr val="dk1"/>
-              </a:solidFill>
-              <a:latin typeface="Calibri"/>
-              <a:ea typeface="Calibri"/>
-              <a:cs typeface="Calibri"/>
-              <a:sym typeface="Calibri"/>
-            </a:endParaRPr>
+            <a:r>
+              <a:rPr lang="en-US" sz="1087" b="0" i="0" u="none" strike="noStrike" cap="none" dirty="0">
+                <a:solidFill>
+                  <a:srgbClr val="B0BEC5"/>
+                </a:solidFill>
+                <a:latin typeface="Malgun Gothic"/>
+                <a:ea typeface="Malgun Gothic"/>
+                <a:cs typeface="Malgun Gothic"/>
+                <a:sym typeface="Malgun Gothic"/>
+              </a:rPr>
+              <a:t> </a:t>
+            </a:r>
+            <a:r>
+              <a:rPr lang="en-US" sz="1087" b="0" i="0" u="none" strike="noStrike" cap="none" dirty="0" err="1">
+                <a:solidFill>
+                  <a:srgbClr val="B0BEC5"/>
+                </a:solidFill>
+                <a:latin typeface="Malgun Gothic"/>
+                <a:ea typeface="Malgun Gothic"/>
+                <a:cs typeface="Malgun Gothic"/>
+                <a:sym typeface="Malgun Gothic"/>
+              </a:rPr>
+              <a:t>엔진이</a:t>
+            </a:r>
+            <a:r>
+              <a:rPr lang="en-US" sz="1087" b="0" i="0" u="none" strike="noStrike" cap="none" dirty="0">
+                <a:solidFill>
+                  <a:srgbClr val="B0BEC5"/>
+                </a:solidFill>
+                <a:latin typeface="Malgun Gothic"/>
+                <a:ea typeface="Malgun Gothic"/>
+                <a:cs typeface="Malgun Gothic"/>
+                <a:sym typeface="Malgun Gothic"/>
+              </a:rPr>
+              <a:t> 한 번 </a:t>
+            </a:r>
+            <a:r>
+              <a:rPr lang="en-US" sz="1087" b="0" i="0" u="none" strike="noStrike" cap="none" dirty="0" err="1">
+                <a:solidFill>
+                  <a:srgbClr val="B0BEC5"/>
+                </a:solidFill>
+                <a:latin typeface="Malgun Gothic"/>
+                <a:ea typeface="Malgun Gothic"/>
+                <a:cs typeface="Malgun Gothic"/>
+                <a:sym typeface="Malgun Gothic"/>
+              </a:rPr>
+              <a:t>출발하면</a:t>
+            </a:r>
+            <a:r>
+              <a:rPr lang="en-US" sz="1087" b="0" i="0" u="none" strike="noStrike" cap="none" dirty="0">
+                <a:solidFill>
+                  <a:srgbClr val="B0BEC5"/>
+                </a:solidFill>
+                <a:latin typeface="Malgun Gothic"/>
+                <a:ea typeface="Malgun Gothic"/>
+                <a:cs typeface="Malgun Gothic"/>
+                <a:sym typeface="Malgun Gothic"/>
+              </a:rPr>
+              <a:t> </a:t>
+            </a:r>
+            <a:r>
+              <a:rPr lang="en-US" sz="1087" b="0" i="0" u="none" strike="noStrike" cap="none" dirty="0" err="1">
+                <a:solidFill>
+                  <a:srgbClr val="B0BEC5"/>
+                </a:solidFill>
+                <a:latin typeface="Malgun Gothic"/>
+                <a:ea typeface="Malgun Gothic"/>
+                <a:cs typeface="Malgun Gothic"/>
+                <a:sym typeface="Malgun Gothic"/>
+              </a:rPr>
+              <a:t>멈추기</a:t>
+            </a:r>
+            <a:r>
+              <a:rPr lang="en-US" sz="1087" b="0" i="0" u="none" strike="noStrike" cap="none" dirty="0">
+                <a:solidFill>
+                  <a:srgbClr val="B0BEC5"/>
+                </a:solidFill>
+                <a:latin typeface="Malgun Gothic"/>
+                <a:ea typeface="Malgun Gothic"/>
+                <a:cs typeface="Malgun Gothic"/>
+                <a:sym typeface="Malgun Gothic"/>
+              </a:rPr>
+              <a:t> </a:t>
+            </a:r>
+            <a:r>
+              <a:rPr lang="en-US" sz="1087" b="0" i="0" u="none" strike="noStrike" cap="none" dirty="0" err="1">
+                <a:solidFill>
+                  <a:srgbClr val="B0BEC5"/>
+                </a:solidFill>
+                <a:latin typeface="Malgun Gothic"/>
+                <a:ea typeface="Malgun Gothic"/>
+                <a:cs typeface="Malgun Gothic"/>
+                <a:sym typeface="Malgun Gothic"/>
+              </a:rPr>
+              <a:t>힘든</a:t>
+            </a:r>
+            <a:r>
+              <a:rPr lang="en-US" sz="1087" b="0" i="0" u="none" strike="noStrike" cap="none" dirty="0">
+                <a:solidFill>
+                  <a:srgbClr val="B0BEC5"/>
+                </a:solidFill>
+                <a:latin typeface="Malgun Gothic"/>
+                <a:ea typeface="Malgun Gothic"/>
+                <a:cs typeface="Malgun Gothic"/>
+                <a:sym typeface="Malgun Gothic"/>
+              </a:rPr>
+              <a:t> </a:t>
+            </a:r>
+            <a:r>
+              <a:rPr lang="en-US" sz="1087" b="0" i="0" u="none" strike="noStrike" cap="none" dirty="0" err="1">
+                <a:solidFill>
+                  <a:srgbClr val="B0BEC5"/>
+                </a:solidFill>
+                <a:latin typeface="Malgun Gothic"/>
+                <a:ea typeface="Malgun Gothic"/>
+                <a:cs typeface="Malgun Gothic"/>
+                <a:sym typeface="Malgun Gothic"/>
+              </a:rPr>
+              <a:t>단점을</a:t>
+            </a:r>
+            <a:r>
+              <a:rPr lang="en-US" sz="1087" b="0" i="0" u="none" strike="noStrike" cap="none" dirty="0">
+                <a:solidFill>
+                  <a:srgbClr val="B0BEC5"/>
+                </a:solidFill>
+                <a:latin typeface="Malgun Gothic"/>
+                <a:ea typeface="Malgun Gothic"/>
+                <a:cs typeface="Malgun Gothic"/>
+                <a:sym typeface="Malgun Gothic"/>
+              </a:rPr>
+              <a:t> </a:t>
+            </a:r>
+            <a:r>
+              <a:rPr lang="en-US" sz="1087" b="0" i="0" u="none" strike="noStrike" cap="none" dirty="0" err="1">
+                <a:solidFill>
+                  <a:srgbClr val="B0BEC5"/>
+                </a:solidFill>
+                <a:latin typeface="Malgun Gothic"/>
+                <a:ea typeface="Malgun Gothic"/>
+                <a:cs typeface="Malgun Gothic"/>
+                <a:sym typeface="Malgun Gothic"/>
+              </a:rPr>
+              <a:t>해결하기</a:t>
+            </a:r>
+            <a:r>
+              <a:rPr lang="en-US" sz="1087" b="0" i="0" u="none" strike="noStrike" cap="none" dirty="0">
+                <a:solidFill>
+                  <a:srgbClr val="B0BEC5"/>
+                </a:solidFill>
+                <a:latin typeface="Malgun Gothic"/>
+                <a:ea typeface="Malgun Gothic"/>
+                <a:cs typeface="Malgun Gothic"/>
+                <a:sym typeface="Malgun Gothic"/>
+              </a:rPr>
+              <a:t> </a:t>
+            </a:r>
+            <a:r>
+              <a:rPr lang="en-US" sz="1087" b="0" i="0" u="none" strike="noStrike" cap="none" dirty="0" err="1">
+                <a:solidFill>
+                  <a:srgbClr val="B0BEC5"/>
+                </a:solidFill>
+                <a:latin typeface="Malgun Gothic"/>
+                <a:ea typeface="Malgun Gothic"/>
+                <a:cs typeface="Malgun Gothic"/>
+                <a:sym typeface="Malgun Gothic"/>
+              </a:rPr>
+              <a:t>위해</a:t>
+            </a:r>
+            <a:r>
+              <a:rPr lang="en-US" sz="1087" b="0" i="0" u="none" strike="noStrike" cap="none" dirty="0">
+                <a:solidFill>
+                  <a:srgbClr val="B0BEC5"/>
+                </a:solidFill>
+                <a:latin typeface="Malgun Gothic"/>
+                <a:ea typeface="Malgun Gothic"/>
+                <a:cs typeface="Malgun Gothic"/>
+                <a:sym typeface="Malgun Gothic"/>
+              </a:rPr>
+              <a:t>, </a:t>
+            </a:r>
+            <a:r>
+              <a:rPr lang="en-US" sz="1087" b="0" i="0" u="none" strike="noStrike" cap="none" dirty="0" err="1">
+                <a:solidFill>
+                  <a:srgbClr val="B0BEC5"/>
+                </a:solidFill>
+                <a:latin typeface="Malgun Gothic"/>
+                <a:ea typeface="Malgun Gothic"/>
+                <a:cs typeface="Malgun Gothic"/>
+                <a:sym typeface="Malgun Gothic"/>
+              </a:rPr>
+              <a:t>시스템</a:t>
+            </a:r>
+            <a:r>
+              <a:rPr lang="en-US" sz="1087" b="0" i="0" u="none" strike="noStrike" cap="none" dirty="0">
+                <a:solidFill>
+                  <a:srgbClr val="B0BEC5"/>
+                </a:solidFill>
+                <a:latin typeface="Malgun Gothic"/>
+                <a:ea typeface="Malgun Gothic"/>
+                <a:cs typeface="Malgun Gothic"/>
+                <a:sym typeface="Malgun Gothic"/>
+              </a:rPr>
+              <a:t> </a:t>
+            </a:r>
+            <a:r>
+              <a:rPr lang="en-US" sz="1087" b="0" i="0" u="none" strike="noStrike" cap="none" dirty="0" err="1">
+                <a:solidFill>
+                  <a:srgbClr val="B0BEC5"/>
+                </a:solidFill>
+                <a:latin typeface="Malgun Gothic"/>
+                <a:ea typeface="Malgun Gothic"/>
+                <a:cs typeface="Malgun Gothic"/>
+                <a:sym typeface="Malgun Gothic"/>
+              </a:rPr>
+              <a:t>정지</a:t>
+            </a:r>
+            <a:r>
+              <a:rPr lang="en-US" sz="1087" b="0" i="0" u="none" strike="noStrike" cap="none" dirty="0">
+                <a:solidFill>
+                  <a:srgbClr val="B0BEC5"/>
+                </a:solidFill>
+                <a:latin typeface="Malgun Gothic"/>
+                <a:ea typeface="Malgun Gothic"/>
+                <a:cs typeface="Malgun Gothic"/>
+                <a:sym typeface="Malgun Gothic"/>
+              </a:rPr>
+              <a:t> </a:t>
+            </a:r>
+            <a:r>
+              <a:rPr lang="en-US" sz="1087" b="0" i="0" u="none" strike="noStrike" cap="none" dirty="0" err="1">
+                <a:solidFill>
+                  <a:srgbClr val="B0BEC5"/>
+                </a:solidFill>
+                <a:latin typeface="Malgun Gothic"/>
+                <a:ea typeface="Malgun Gothic"/>
+                <a:cs typeface="Malgun Gothic"/>
+                <a:sym typeface="Malgun Gothic"/>
+              </a:rPr>
+              <a:t>요청이나</a:t>
+            </a:r>
+            <a:r>
+              <a:rPr lang="en-US" sz="1087" b="0" i="0" u="none" strike="noStrike" cap="none" dirty="0">
+                <a:solidFill>
+                  <a:srgbClr val="B0BEC5"/>
+                </a:solidFill>
+                <a:latin typeface="Malgun Gothic"/>
+                <a:ea typeface="Malgun Gothic"/>
+                <a:cs typeface="Malgun Gothic"/>
+                <a:sym typeface="Malgun Gothic"/>
+              </a:rPr>
+              <a:t> </a:t>
+            </a:r>
+            <a:r>
+              <a:rPr lang="en-US" sz="1087" b="0" i="0" u="none" strike="noStrike" cap="none" dirty="0" err="1">
+                <a:solidFill>
+                  <a:srgbClr val="B0BEC5"/>
+                </a:solidFill>
+                <a:latin typeface="Malgun Gothic"/>
+                <a:ea typeface="Malgun Gothic"/>
+                <a:cs typeface="Malgun Gothic"/>
+                <a:sym typeface="Malgun Gothic"/>
+              </a:rPr>
+              <a:t>사람</a:t>
+            </a:r>
+            <a:r>
+              <a:rPr lang="en-US" sz="1087" b="0" i="0" u="none" strike="noStrike" cap="none" dirty="0">
+                <a:solidFill>
+                  <a:srgbClr val="B0BEC5"/>
+                </a:solidFill>
+                <a:latin typeface="Malgun Gothic"/>
+                <a:ea typeface="Malgun Gothic"/>
+                <a:cs typeface="Malgun Gothic"/>
+                <a:sym typeface="Malgun Gothic"/>
+              </a:rPr>
+              <a:t> </a:t>
+            </a:r>
+            <a:r>
+              <a:rPr lang="en-US" sz="1087" b="0" i="0" u="none" strike="noStrike" cap="none" dirty="0" err="1">
+                <a:solidFill>
+                  <a:srgbClr val="B0BEC5"/>
+                </a:solidFill>
+                <a:latin typeface="Malgun Gothic"/>
+                <a:ea typeface="Malgun Gothic"/>
+                <a:cs typeface="Malgun Gothic"/>
+                <a:sym typeface="Malgun Gothic"/>
+              </a:rPr>
+              <a:t>유실</a:t>
+            </a:r>
+            <a:r>
+              <a:rPr lang="en-US" sz="1087" b="0" i="0" u="none" strike="noStrike" cap="none" dirty="0">
+                <a:solidFill>
+                  <a:srgbClr val="B0BEC5"/>
+                </a:solidFill>
+                <a:latin typeface="Malgun Gothic"/>
+                <a:ea typeface="Malgun Gothic"/>
+                <a:cs typeface="Malgun Gothic"/>
+                <a:sym typeface="Malgun Gothic"/>
+              </a:rPr>
+              <a:t> 시 </a:t>
+            </a:r>
+            <a:r>
+              <a:rPr lang="en-US" sz="1087" b="0" i="0" u="none" strike="noStrike" cap="none" dirty="0" err="1">
+                <a:solidFill>
+                  <a:srgbClr val="B0BEC5"/>
+                </a:solidFill>
+                <a:latin typeface="Malgun Gothic"/>
+                <a:ea typeface="Malgun Gothic"/>
+                <a:cs typeface="Malgun Gothic"/>
+                <a:sym typeface="Malgun Gothic"/>
+              </a:rPr>
+              <a:t>액션</a:t>
+            </a:r>
+            <a:r>
+              <a:rPr lang="en-US" sz="1087" b="0" i="0" u="none" strike="noStrike" cap="none" dirty="0">
+                <a:solidFill>
+                  <a:srgbClr val="B0BEC5"/>
+                </a:solidFill>
+                <a:latin typeface="Malgun Gothic"/>
+                <a:ea typeface="Malgun Gothic"/>
+                <a:cs typeface="Malgun Gothic"/>
+                <a:sym typeface="Malgun Gothic"/>
+              </a:rPr>
+              <a:t> </a:t>
+            </a:r>
+            <a:r>
+              <a:rPr lang="en-US" sz="1087" b="0" i="0" u="none" strike="noStrike" cap="none" dirty="0" err="1">
+                <a:solidFill>
+                  <a:srgbClr val="B0BEC5"/>
+                </a:solidFill>
+                <a:latin typeface="Malgun Gothic"/>
+                <a:ea typeface="Malgun Gothic"/>
+                <a:cs typeface="Malgun Gothic"/>
+                <a:sym typeface="Malgun Gothic"/>
+              </a:rPr>
+              <a:t>클라이언트</a:t>
+            </a:r>
+            <a:r>
+              <a:rPr lang="en-US" sz="1087" b="0" i="0" u="none" strike="noStrike" cap="none" dirty="0">
+                <a:solidFill>
+                  <a:srgbClr val="B0BEC5"/>
+                </a:solidFill>
+                <a:latin typeface="Malgun Gothic"/>
+                <a:ea typeface="Malgun Gothic"/>
+                <a:cs typeface="Malgun Gothic"/>
+                <a:sym typeface="Malgun Gothic"/>
+              </a:rPr>
+              <a:t>(</a:t>
+            </a:r>
+            <a:r>
+              <a:rPr lang="en-US" sz="1087" b="0" i="0" u="none" strike="noStrike" cap="none" dirty="0" err="1">
+                <a:solidFill>
+                  <a:srgbClr val="B0BEC5"/>
+                </a:solidFill>
+                <a:latin typeface="Malgun Gothic"/>
+                <a:ea typeface="Malgun Gothic"/>
+                <a:cs typeface="Malgun Gothic"/>
+                <a:sym typeface="Malgun Gothic"/>
+              </a:rPr>
+              <a:t>self.cancel_current_goal</a:t>
+            </a:r>
+            <a:r>
+              <a:rPr lang="en-US" sz="1087" b="0" i="0" u="none" strike="noStrike" cap="none" dirty="0">
+                <a:solidFill>
+                  <a:srgbClr val="B0BEC5"/>
+                </a:solidFill>
+                <a:latin typeface="Malgun Gothic"/>
+                <a:ea typeface="Malgun Gothic"/>
+                <a:cs typeface="Malgun Gothic"/>
+                <a:sym typeface="Malgun Gothic"/>
+              </a:rPr>
+              <a:t>)를 </a:t>
+            </a:r>
+            <a:r>
+              <a:rPr lang="en-US" sz="1087" b="0" i="0" u="none" strike="noStrike" cap="none" dirty="0" err="1">
+                <a:solidFill>
+                  <a:srgbClr val="B0BEC5"/>
+                </a:solidFill>
+                <a:latin typeface="Malgun Gothic"/>
+                <a:ea typeface="Malgun Gothic"/>
+                <a:cs typeface="Malgun Gothic"/>
+                <a:sym typeface="Malgun Gothic"/>
+              </a:rPr>
+              <a:t>강제</a:t>
+            </a:r>
+            <a:r>
+              <a:rPr lang="en-US" sz="1087" b="0" i="0" u="none" strike="noStrike" cap="none" dirty="0">
+                <a:solidFill>
+                  <a:srgbClr val="B0BEC5"/>
+                </a:solidFill>
+                <a:latin typeface="Malgun Gothic"/>
+                <a:ea typeface="Malgun Gothic"/>
+                <a:cs typeface="Malgun Gothic"/>
+                <a:sym typeface="Malgun Gothic"/>
+              </a:rPr>
+              <a:t> </a:t>
+            </a:r>
+            <a:r>
+              <a:rPr lang="en-US" sz="1087" b="0" i="0" u="none" strike="noStrike" cap="none" dirty="0" err="1">
+                <a:solidFill>
+                  <a:srgbClr val="B0BEC5"/>
+                </a:solidFill>
+                <a:latin typeface="Malgun Gothic"/>
+                <a:ea typeface="Malgun Gothic"/>
+                <a:cs typeface="Malgun Gothic"/>
+                <a:sym typeface="Malgun Gothic"/>
+              </a:rPr>
+              <a:t>개입시켜</a:t>
+            </a:r>
+            <a:r>
+              <a:rPr lang="en-US" sz="1087" b="0" i="0" u="none" strike="noStrike" cap="none" dirty="0">
+                <a:solidFill>
+                  <a:srgbClr val="B0BEC5"/>
+                </a:solidFill>
+                <a:latin typeface="Malgun Gothic"/>
+                <a:ea typeface="Malgun Gothic"/>
+                <a:cs typeface="Malgun Gothic"/>
+                <a:sym typeface="Malgun Gothic"/>
+              </a:rPr>
+              <a:t> </a:t>
+            </a:r>
+            <a:r>
+              <a:rPr lang="en-US" sz="1087" b="0" i="0" u="none" strike="noStrike" cap="none" dirty="0" err="1">
+                <a:solidFill>
+                  <a:srgbClr val="B0BEC5"/>
+                </a:solidFill>
+                <a:latin typeface="Malgun Gothic"/>
+                <a:ea typeface="Malgun Gothic"/>
+                <a:cs typeface="Malgun Gothic"/>
+                <a:sym typeface="Malgun Gothic"/>
+              </a:rPr>
+              <a:t>언제든</a:t>
+            </a:r>
+            <a:r>
+              <a:rPr lang="en-US" sz="1087" b="0" i="0" u="none" strike="noStrike" cap="none" dirty="0">
+                <a:solidFill>
+                  <a:srgbClr val="B0BEC5"/>
+                </a:solidFill>
+                <a:latin typeface="Malgun Gothic"/>
+                <a:ea typeface="Malgun Gothic"/>
+                <a:cs typeface="Malgun Gothic"/>
+                <a:sym typeface="Malgun Gothic"/>
+              </a:rPr>
+              <a:t> </a:t>
+            </a:r>
+            <a:r>
+              <a:rPr lang="en-US" sz="1087" b="0" i="0" u="none" strike="noStrike" cap="none" dirty="0" err="1">
+                <a:solidFill>
+                  <a:srgbClr val="B0BEC5"/>
+                </a:solidFill>
+                <a:latin typeface="Malgun Gothic"/>
+                <a:ea typeface="Malgun Gothic"/>
+                <a:cs typeface="Malgun Gothic"/>
+                <a:sym typeface="Malgun Gothic"/>
+              </a:rPr>
+              <a:t>로봇을</a:t>
+            </a:r>
+            <a:r>
+              <a:rPr lang="en-US" sz="1087" b="0" i="0" u="none" strike="noStrike" cap="none" dirty="0">
+                <a:solidFill>
+                  <a:srgbClr val="B0BEC5"/>
+                </a:solidFill>
+                <a:latin typeface="Malgun Gothic"/>
+                <a:ea typeface="Malgun Gothic"/>
+                <a:cs typeface="Malgun Gothic"/>
+                <a:sym typeface="Malgun Gothic"/>
+              </a:rPr>
+              <a:t> </a:t>
+            </a:r>
+            <a:r>
+              <a:rPr lang="en-US" sz="1087" b="0" i="0" u="none" strike="noStrike" cap="none" dirty="0" err="1">
+                <a:solidFill>
+                  <a:srgbClr val="B0BEC5"/>
+                </a:solidFill>
+                <a:latin typeface="Malgun Gothic"/>
+                <a:ea typeface="Malgun Gothic"/>
+                <a:cs typeface="Malgun Gothic"/>
+                <a:sym typeface="Malgun Gothic"/>
+              </a:rPr>
+              <a:t>즉각</a:t>
+            </a:r>
+            <a:r>
+              <a:rPr lang="en-US" sz="1087" b="0" i="0" u="none" strike="noStrike" cap="none" dirty="0">
+                <a:solidFill>
+                  <a:srgbClr val="B0BEC5"/>
+                </a:solidFill>
+                <a:latin typeface="Malgun Gothic"/>
+                <a:ea typeface="Malgun Gothic"/>
+                <a:cs typeface="Malgun Gothic"/>
+                <a:sym typeface="Malgun Gothic"/>
+              </a:rPr>
+              <a:t> </a:t>
+            </a:r>
+            <a:r>
+              <a:rPr lang="en-US" sz="1087" b="0" i="0" u="none" strike="noStrike" cap="none" dirty="0" err="1">
+                <a:solidFill>
+                  <a:srgbClr val="B0BEC5"/>
+                </a:solidFill>
+                <a:latin typeface="Malgun Gothic"/>
+                <a:ea typeface="Malgun Gothic"/>
+                <a:cs typeface="Malgun Gothic"/>
+                <a:sym typeface="Malgun Gothic"/>
+              </a:rPr>
+              <a:t>제동할</a:t>
+            </a:r>
+            <a:r>
+              <a:rPr lang="en-US" sz="1087" b="0" i="0" u="none" strike="noStrike" cap="none" dirty="0">
+                <a:solidFill>
+                  <a:srgbClr val="B0BEC5"/>
+                </a:solidFill>
+                <a:latin typeface="Malgun Gothic"/>
+                <a:ea typeface="Malgun Gothic"/>
+                <a:cs typeface="Malgun Gothic"/>
+                <a:sym typeface="Malgun Gothic"/>
+              </a:rPr>
+              <a:t> 수 </a:t>
+            </a:r>
+            <a:r>
+              <a:rPr lang="en-US" sz="1087" b="0" i="0" u="none" strike="noStrike" cap="none" dirty="0" err="1">
+                <a:solidFill>
+                  <a:srgbClr val="B0BEC5"/>
+                </a:solidFill>
+                <a:latin typeface="Malgun Gothic"/>
+                <a:ea typeface="Malgun Gothic"/>
+                <a:cs typeface="Malgun Gothic"/>
+                <a:sym typeface="Malgun Gothic"/>
+              </a:rPr>
+              <a:t>있도록</a:t>
+            </a:r>
+            <a:r>
+              <a:rPr lang="en-US" sz="1087" b="0" i="0" u="none" strike="noStrike" cap="none" dirty="0">
+                <a:solidFill>
+                  <a:srgbClr val="B0BEC5"/>
+                </a:solidFill>
+                <a:latin typeface="Malgun Gothic"/>
+                <a:ea typeface="Malgun Gothic"/>
+                <a:cs typeface="Malgun Gothic"/>
+                <a:sym typeface="Malgun Gothic"/>
+              </a:rPr>
+              <a:t> </a:t>
+            </a:r>
+            <a:r>
+              <a:rPr lang="en-US" sz="1087" b="0" i="0" u="none" strike="noStrike" cap="none" dirty="0" err="1">
+                <a:solidFill>
+                  <a:srgbClr val="B0BEC5"/>
+                </a:solidFill>
+                <a:latin typeface="Malgun Gothic"/>
+                <a:ea typeface="Malgun Gothic"/>
+                <a:cs typeface="Malgun Gothic"/>
+                <a:sym typeface="Malgun Gothic"/>
+              </a:rPr>
+              <a:t>설계했습니다</a:t>
+            </a:r>
+            <a:r>
+              <a:rPr lang="en-US" sz="1087" b="0" i="0" u="none" strike="noStrike" cap="none" dirty="0">
+                <a:solidFill>
+                  <a:srgbClr val="B0BEC5"/>
+                </a:solidFill>
+                <a:latin typeface="Malgun Gothic"/>
+                <a:ea typeface="Malgun Gothic"/>
+                <a:cs typeface="Malgun Gothic"/>
+                <a:sym typeface="Malgun Gothic"/>
+              </a:rPr>
+              <a:t>.</a:t>
+            </a:r>
+            <a:endParaRPr dirty="0"/>
           </a:p>
         </p:txBody>
       </p:sp>
@@ -11324,7 +11840,7 @@
         </p:blipFill>
         <p:spPr>
           <a:xfrm>
-            <a:off x="485775" y="1814512"/>
+            <a:off x="504825" y="1856779"/>
             <a:ext cx="2662237" cy="447675"/>
           </a:xfrm>
           <a:prstGeom prst="rect">
@@ -11477,54 +11993,6 @@
           </a:p>
         </p:txBody>
       </p:sp>
-      <p:sp>
-        <p:nvSpPr>
-          <p:cNvPr id="103" name="Google Shape;103;p13"/>
-          <p:cNvSpPr/>
-          <p:nvPr/>
-        </p:nvSpPr>
-        <p:spPr>
-          <a:xfrm>
-            <a:off x="3338512" y="3688258"/>
-            <a:ext cx="2662237" cy="38100"/>
-          </a:xfrm>
-          <a:prstGeom prst="rect">
-            <a:avLst/>
-          </a:prstGeom>
-          <a:solidFill>
-            <a:srgbClr val="FFD600"/>
-          </a:solidFill>
-          <a:ln>
-            <a:noFill/>
-          </a:ln>
-        </p:spPr>
-        <p:txBody>
-          <a:bodyPr spcFirstLastPara="1" wrap="square" lIns="91425" tIns="45700" rIns="91425" bIns="45700" anchor="ctr" anchorCtr="0">
-            <a:noAutofit/>
-          </a:bodyPr>
-          <a:lstStyle/>
-          <a:p>
-            <a:pPr marL="0" marR="0" lvl="0" indent="0" algn="ctr" rtl="0">
-              <a:spcBef>
-                <a:spcPts val="0"/>
-              </a:spcBef>
-              <a:spcAft>
-                <a:spcPts val="0"/>
-              </a:spcAft>
-              <a:buNone/>
-            </a:pPr>
-            <a:endParaRPr sz="1800" b="0" i="0" u="none" strike="noStrike" cap="none">
-              <a:solidFill>
-                <a:schemeClr val="dk1"/>
-              </a:solidFill>
-              <a:latin typeface="Calibri"/>
-              <a:ea typeface="Calibri"/>
-              <a:cs typeface="Calibri"/>
-              <a:sym typeface="Calibri"/>
-            </a:endParaRPr>
-          </a:p>
-        </p:txBody>
-      </p:sp>
       <p:pic>
         <p:nvPicPr>
           <p:cNvPr id="104" name="Google Shape;104;p13" descr="image.png"/>
@@ -11540,7 +12008,7 @@
         </p:blipFill>
         <p:spPr>
           <a:xfrm>
-            <a:off x="3338512" y="1814512"/>
+            <a:off x="3338512" y="1860797"/>
             <a:ext cx="2662237" cy="447675"/>
           </a:xfrm>
           <a:prstGeom prst="rect">
@@ -11693,54 +12161,6 @@
           </a:p>
         </p:txBody>
       </p:sp>
-      <p:sp>
-        <p:nvSpPr>
-          <p:cNvPr id="107" name="Google Shape;107;p13"/>
-          <p:cNvSpPr/>
-          <p:nvPr/>
-        </p:nvSpPr>
-        <p:spPr>
-          <a:xfrm>
-            <a:off x="6191250" y="3688258"/>
-            <a:ext cx="2662237" cy="38100"/>
-          </a:xfrm>
-          <a:prstGeom prst="rect">
-            <a:avLst/>
-          </a:prstGeom>
-          <a:solidFill>
-            <a:srgbClr val="FF6B6B"/>
-          </a:solidFill>
-          <a:ln>
-            <a:noFill/>
-          </a:ln>
-        </p:spPr>
-        <p:txBody>
-          <a:bodyPr spcFirstLastPara="1" wrap="square" lIns="91425" tIns="45700" rIns="91425" bIns="45700" anchor="ctr" anchorCtr="0">
-            <a:noAutofit/>
-          </a:bodyPr>
-          <a:lstStyle/>
-          <a:p>
-            <a:pPr marL="0" marR="0" lvl="0" indent="0" algn="ctr" rtl="0">
-              <a:spcBef>
-                <a:spcPts val="0"/>
-              </a:spcBef>
-              <a:spcAft>
-                <a:spcPts val="0"/>
-              </a:spcAft>
-              <a:buNone/>
-            </a:pPr>
-            <a:endParaRPr sz="1800" b="0" i="0" u="none" strike="noStrike" cap="none">
-              <a:solidFill>
-                <a:schemeClr val="dk1"/>
-              </a:solidFill>
-              <a:latin typeface="Calibri"/>
-              <a:ea typeface="Calibri"/>
-              <a:cs typeface="Calibri"/>
-              <a:sym typeface="Calibri"/>
-            </a:endParaRPr>
-          </a:p>
-        </p:txBody>
-      </p:sp>
       <p:pic>
         <p:nvPicPr>
           <p:cNvPr id="108" name="Google Shape;108;p13" descr="image.png"/>
@@ -11756,7 +12176,7 @@
         </p:blipFill>
         <p:spPr>
           <a:xfrm>
-            <a:off x="6191250" y="1814512"/>
+            <a:off x="6191250" y="1870416"/>
             <a:ext cx="2662237" cy="447675"/>
           </a:xfrm>
           <a:prstGeom prst="rect">
@@ -11909,54 +12329,6 @@
           </a:p>
         </p:txBody>
       </p:sp>
-      <p:sp>
-        <p:nvSpPr>
-          <p:cNvPr id="111" name="Google Shape;111;p13"/>
-          <p:cNvSpPr/>
-          <p:nvPr/>
-        </p:nvSpPr>
-        <p:spPr>
-          <a:xfrm>
-            <a:off x="9043987" y="3688258"/>
-            <a:ext cx="2662237" cy="38100"/>
-          </a:xfrm>
-          <a:prstGeom prst="rect">
-            <a:avLst/>
-          </a:prstGeom>
-          <a:solidFill>
-            <a:srgbClr val="00FF88"/>
-          </a:solidFill>
-          <a:ln>
-            <a:noFill/>
-          </a:ln>
-        </p:spPr>
-        <p:txBody>
-          <a:bodyPr spcFirstLastPara="1" wrap="square" lIns="91425" tIns="45700" rIns="91425" bIns="45700" anchor="ctr" anchorCtr="0">
-            <a:noAutofit/>
-          </a:bodyPr>
-          <a:lstStyle/>
-          <a:p>
-            <a:pPr marL="0" marR="0" lvl="0" indent="0" algn="ctr" rtl="0">
-              <a:spcBef>
-                <a:spcPts val="0"/>
-              </a:spcBef>
-              <a:spcAft>
-                <a:spcPts val="0"/>
-              </a:spcAft>
-              <a:buNone/>
-            </a:pPr>
-            <a:endParaRPr sz="1800" b="0" i="0" u="none" strike="noStrike" cap="none">
-              <a:solidFill>
-                <a:schemeClr val="dk1"/>
-              </a:solidFill>
-              <a:latin typeface="Calibri"/>
-              <a:ea typeface="Calibri"/>
-              <a:cs typeface="Calibri"/>
-              <a:sym typeface="Calibri"/>
-            </a:endParaRPr>
-          </a:p>
-        </p:txBody>
-      </p:sp>
       <p:pic>
         <p:nvPicPr>
           <p:cNvPr id="112" name="Google Shape;112;p13" descr="image.png"/>
@@ -11972,7 +12344,7 @@
         </p:blipFill>
         <p:spPr>
           <a:xfrm>
-            <a:off x="9043987" y="1814512"/>
+            <a:off x="9053512" y="1870416"/>
             <a:ext cx="2662237" cy="438150"/>
           </a:xfrm>
           <a:prstGeom prst="rect">
@@ -12981,7 +13353,7 @@
         </p:nvSpPr>
         <p:spPr>
           <a:xfrm>
-            <a:off x="1171575" y="5990629"/>
+            <a:off x="1151897" y="6012061"/>
             <a:ext cx="10248900" cy="407193"/>
           </a:xfrm>
           <a:prstGeom prst="rect">
@@ -13011,7 +13383,7 @@
               <a:buNone/>
             </a:pPr>
             <a:r>
-              <a:rPr lang="en-US" sz="1087" b="0" i="0" u="none" strike="noStrike" cap="none">
+              <a:rPr lang="en-US" sz="1087" b="0" i="0" u="none" strike="noStrike" cap="none" dirty="0" err="1">
                 <a:solidFill>
                   <a:srgbClr val="B0BEC5"/>
                 </a:solidFill>
@@ -13020,57 +13392,573 @@
                 <a:cs typeface="Malgun Gothic"/>
                 <a:sym typeface="Malgun Gothic"/>
               </a:rPr>
-              <a:t>동일한 주행 노드(nav2_commander.py)를 재사용하지만, 조건문(if 20 &lt;= mode &lt;= 27)을 통해 이벤트 구독과 콜백 처리 로직을 완벽히 분리했습니다. 코드는 간결하게 유지하면서 안내 모드와 주행 모드의 100% 다른 주행 특성을 구현했습니다.</a:t>
+              <a:t>동일한</a:t>
             </a:r>
-            <a:endParaRPr/>
-          </a:p>
-        </p:txBody>
-      </p:sp>
-      <p:sp>
-        <p:nvSpPr>
-          <p:cNvPr id="144" name="Google Shape;144;p14"/>
-          <p:cNvSpPr/>
-          <p:nvPr/>
-        </p:nvSpPr>
-        <p:spPr>
-          <a:xfrm>
-            <a:off x="485775" y="3688258"/>
-            <a:ext cx="2662237" cy="38100"/>
-          </a:xfrm>
-          <a:prstGeom prst="rect">
-            <a:avLst/>
-          </a:prstGeom>
-          <a:solidFill>
-            <a:srgbClr val="00FF88"/>
-          </a:solidFill>
-          <a:ln>
-            <a:noFill/>
-          </a:ln>
-        </p:spPr>
-        <p:txBody>
-          <a:bodyPr spcFirstLastPara="1" wrap="square" lIns="91425" tIns="45700" rIns="91425" bIns="45700" anchor="ctr" anchorCtr="0">
-            <a:noAutofit/>
-          </a:bodyPr>
-          <a:lstStyle/>
-          <a:p>
-            <a:pPr marL="0" marR="0" lvl="0" indent="0" algn="ctr" rtl="0">
-              <a:spcBef>
-                <a:spcPts val="0"/>
-              </a:spcBef>
-              <a:spcAft>
-                <a:spcPts val="0"/>
-              </a:spcAft>
-              <a:buNone/>
-            </a:pPr>
-            <a:endParaRPr sz="1800" b="0" i="0" u="none" strike="noStrike" cap="none">
-              <a:solidFill>
-                <a:schemeClr val="dk1"/>
-              </a:solidFill>
-              <a:latin typeface="Calibri"/>
-              <a:ea typeface="Calibri"/>
-              <a:cs typeface="Calibri"/>
-              <a:sym typeface="Calibri"/>
-            </a:endParaRPr>
+            <a:r>
+              <a:rPr lang="en-US" sz="1087" b="0" i="0" u="none" strike="noStrike" cap="none" dirty="0">
+                <a:solidFill>
+                  <a:srgbClr val="B0BEC5"/>
+                </a:solidFill>
+                <a:latin typeface="Malgun Gothic"/>
+                <a:ea typeface="Malgun Gothic"/>
+                <a:cs typeface="Malgun Gothic"/>
+                <a:sym typeface="Malgun Gothic"/>
+              </a:rPr>
+              <a:t> </a:t>
+            </a:r>
+            <a:r>
+              <a:rPr lang="en-US" sz="1087" b="0" i="0" u="none" strike="noStrike" cap="none" dirty="0" err="1">
+                <a:solidFill>
+                  <a:srgbClr val="B0BEC5"/>
+                </a:solidFill>
+                <a:latin typeface="Malgun Gothic"/>
+                <a:ea typeface="Malgun Gothic"/>
+                <a:cs typeface="Malgun Gothic"/>
+                <a:sym typeface="Malgun Gothic"/>
+              </a:rPr>
+              <a:t>주행</a:t>
+            </a:r>
+            <a:r>
+              <a:rPr lang="en-US" sz="1087" b="0" i="0" u="none" strike="noStrike" cap="none" dirty="0">
+                <a:solidFill>
+                  <a:srgbClr val="B0BEC5"/>
+                </a:solidFill>
+                <a:latin typeface="Malgun Gothic"/>
+                <a:ea typeface="Malgun Gothic"/>
+                <a:cs typeface="Malgun Gothic"/>
+                <a:sym typeface="Malgun Gothic"/>
+              </a:rPr>
+              <a:t> </a:t>
+            </a:r>
+            <a:r>
+              <a:rPr lang="en-US" sz="1087" b="0" i="0" u="none" strike="noStrike" cap="none" dirty="0" err="1">
+                <a:solidFill>
+                  <a:srgbClr val="B0BEC5"/>
+                </a:solidFill>
+                <a:latin typeface="Malgun Gothic"/>
+                <a:ea typeface="Malgun Gothic"/>
+                <a:cs typeface="Malgun Gothic"/>
+                <a:sym typeface="Malgun Gothic"/>
+              </a:rPr>
+              <a:t>노드</a:t>
+            </a:r>
+            <a:r>
+              <a:rPr lang="en-US" sz="1087" b="0" i="0" u="none" strike="noStrike" cap="none" dirty="0">
+                <a:solidFill>
+                  <a:srgbClr val="B0BEC5"/>
+                </a:solidFill>
+                <a:latin typeface="Malgun Gothic"/>
+                <a:ea typeface="Malgun Gothic"/>
+                <a:cs typeface="Malgun Gothic"/>
+                <a:sym typeface="Malgun Gothic"/>
+              </a:rPr>
+              <a:t>(nav2_commander.py)를 </a:t>
+            </a:r>
+            <a:r>
+              <a:rPr lang="en-US" sz="1087" b="0" i="0" u="none" strike="noStrike" cap="none" dirty="0" err="1">
+                <a:solidFill>
+                  <a:srgbClr val="B0BEC5"/>
+                </a:solidFill>
+                <a:latin typeface="Malgun Gothic"/>
+                <a:ea typeface="Malgun Gothic"/>
+                <a:cs typeface="Malgun Gothic"/>
+                <a:sym typeface="Malgun Gothic"/>
+              </a:rPr>
+              <a:t>재사용하지만</a:t>
+            </a:r>
+            <a:r>
+              <a:rPr lang="en-US" sz="1087" b="0" i="0" u="none" strike="noStrike" cap="none" dirty="0">
+                <a:solidFill>
+                  <a:srgbClr val="B0BEC5"/>
+                </a:solidFill>
+                <a:latin typeface="Malgun Gothic"/>
+                <a:ea typeface="Malgun Gothic"/>
+                <a:cs typeface="Malgun Gothic"/>
+                <a:sym typeface="Malgun Gothic"/>
+              </a:rPr>
+              <a:t>, </a:t>
+            </a:r>
+            <a:r>
+              <a:rPr lang="en-US" sz="1087" b="0" i="0" u="none" strike="noStrike" cap="none" dirty="0" err="1">
+                <a:solidFill>
+                  <a:srgbClr val="B0BEC5"/>
+                </a:solidFill>
+                <a:latin typeface="Malgun Gothic"/>
+                <a:ea typeface="Malgun Gothic"/>
+                <a:cs typeface="Malgun Gothic"/>
+                <a:sym typeface="Malgun Gothic"/>
+              </a:rPr>
+              <a:t>조건문</a:t>
+            </a:r>
+            <a:r>
+              <a:rPr lang="en-US" sz="1087" b="0" i="0" u="none" strike="noStrike" cap="none" dirty="0">
+                <a:solidFill>
+                  <a:srgbClr val="B0BEC5"/>
+                </a:solidFill>
+                <a:latin typeface="Malgun Gothic"/>
+                <a:ea typeface="Malgun Gothic"/>
+                <a:cs typeface="Malgun Gothic"/>
+                <a:sym typeface="Malgun Gothic"/>
+              </a:rPr>
+              <a:t>(if 20 &lt;= mode &lt;= 27)을 </a:t>
+            </a:r>
+            <a:r>
+              <a:rPr lang="en-US" sz="1087" b="0" i="0" u="none" strike="noStrike" cap="none" dirty="0" err="1">
+                <a:solidFill>
+                  <a:srgbClr val="B0BEC5"/>
+                </a:solidFill>
+                <a:latin typeface="Malgun Gothic"/>
+                <a:ea typeface="Malgun Gothic"/>
+                <a:cs typeface="Malgun Gothic"/>
+                <a:sym typeface="Malgun Gothic"/>
+              </a:rPr>
+              <a:t>통해</a:t>
+            </a:r>
+            <a:r>
+              <a:rPr lang="en-US" sz="1087" b="0" i="0" u="none" strike="noStrike" cap="none" dirty="0">
+                <a:solidFill>
+                  <a:srgbClr val="B0BEC5"/>
+                </a:solidFill>
+                <a:latin typeface="Malgun Gothic"/>
+                <a:ea typeface="Malgun Gothic"/>
+                <a:cs typeface="Malgun Gothic"/>
+                <a:sym typeface="Malgun Gothic"/>
+              </a:rPr>
+              <a:t> </a:t>
+            </a:r>
+            <a:r>
+              <a:rPr lang="en-US" sz="1087" b="0" i="0" u="none" strike="noStrike" cap="none" dirty="0" err="1">
+                <a:solidFill>
+                  <a:srgbClr val="B0BEC5"/>
+                </a:solidFill>
+                <a:latin typeface="Malgun Gothic"/>
+                <a:ea typeface="Malgun Gothic"/>
+                <a:cs typeface="Malgun Gothic"/>
+                <a:sym typeface="Malgun Gothic"/>
+              </a:rPr>
+              <a:t>이벤트</a:t>
+            </a:r>
+            <a:r>
+              <a:rPr lang="en-US" sz="1087" b="0" i="0" u="none" strike="noStrike" cap="none" dirty="0">
+                <a:solidFill>
+                  <a:srgbClr val="B0BEC5"/>
+                </a:solidFill>
+                <a:latin typeface="Malgun Gothic"/>
+                <a:ea typeface="Malgun Gothic"/>
+                <a:cs typeface="Malgun Gothic"/>
+                <a:sym typeface="Malgun Gothic"/>
+              </a:rPr>
+              <a:t> </a:t>
+            </a:r>
+            <a:r>
+              <a:rPr lang="en-US" sz="1087" b="0" i="0" u="none" strike="noStrike" cap="none" dirty="0" err="1">
+                <a:solidFill>
+                  <a:srgbClr val="B0BEC5"/>
+                </a:solidFill>
+                <a:latin typeface="Malgun Gothic"/>
+                <a:ea typeface="Malgun Gothic"/>
+                <a:cs typeface="Malgun Gothic"/>
+                <a:sym typeface="Malgun Gothic"/>
+              </a:rPr>
+              <a:t>구독과</a:t>
+            </a:r>
+            <a:r>
+              <a:rPr lang="en-US" sz="1087" b="0" i="0" u="none" strike="noStrike" cap="none" dirty="0">
+                <a:solidFill>
+                  <a:srgbClr val="B0BEC5"/>
+                </a:solidFill>
+                <a:latin typeface="Malgun Gothic"/>
+                <a:ea typeface="Malgun Gothic"/>
+                <a:cs typeface="Malgun Gothic"/>
+                <a:sym typeface="Malgun Gothic"/>
+              </a:rPr>
+              <a:t> </a:t>
+            </a:r>
+            <a:r>
+              <a:rPr lang="en-US" sz="1087" b="0" i="0" u="none" strike="noStrike" cap="none" dirty="0" err="1">
+                <a:solidFill>
+                  <a:srgbClr val="B0BEC5"/>
+                </a:solidFill>
+                <a:latin typeface="Malgun Gothic"/>
+                <a:ea typeface="Malgun Gothic"/>
+                <a:cs typeface="Malgun Gothic"/>
+                <a:sym typeface="Malgun Gothic"/>
+              </a:rPr>
+              <a:t>콜백</a:t>
+            </a:r>
+            <a:r>
+              <a:rPr lang="en-US" sz="1087" b="0" i="0" u="none" strike="noStrike" cap="none" dirty="0">
+                <a:solidFill>
+                  <a:srgbClr val="B0BEC5"/>
+                </a:solidFill>
+                <a:latin typeface="Malgun Gothic"/>
+                <a:ea typeface="Malgun Gothic"/>
+                <a:cs typeface="Malgun Gothic"/>
+                <a:sym typeface="Malgun Gothic"/>
+              </a:rPr>
+              <a:t> </a:t>
+            </a:r>
+            <a:r>
+              <a:rPr lang="en-US" sz="1087" b="0" i="0" u="none" strike="noStrike" cap="none" dirty="0" err="1">
+                <a:solidFill>
+                  <a:srgbClr val="B0BEC5"/>
+                </a:solidFill>
+                <a:latin typeface="Malgun Gothic"/>
+                <a:ea typeface="Malgun Gothic"/>
+                <a:cs typeface="Malgun Gothic"/>
+                <a:sym typeface="Malgun Gothic"/>
+              </a:rPr>
+              <a:t>처리</a:t>
+            </a:r>
+            <a:r>
+              <a:rPr lang="en-US" sz="1087" b="0" i="0" u="none" strike="noStrike" cap="none" dirty="0">
+                <a:solidFill>
+                  <a:srgbClr val="B0BEC5"/>
+                </a:solidFill>
+                <a:latin typeface="Malgun Gothic"/>
+                <a:ea typeface="Malgun Gothic"/>
+                <a:cs typeface="Malgun Gothic"/>
+                <a:sym typeface="Malgun Gothic"/>
+              </a:rPr>
+              <a:t> </a:t>
+            </a:r>
+            <a:r>
+              <a:rPr lang="en-US" sz="1087" b="0" i="0" u="none" strike="noStrike" cap="none" dirty="0" err="1">
+                <a:solidFill>
+                  <a:srgbClr val="B0BEC5"/>
+                </a:solidFill>
+                <a:latin typeface="Malgun Gothic"/>
+                <a:ea typeface="Malgun Gothic"/>
+                <a:cs typeface="Malgun Gothic"/>
+                <a:sym typeface="Malgun Gothic"/>
+              </a:rPr>
+              <a:t>로직을</a:t>
+            </a:r>
+            <a:r>
+              <a:rPr lang="en-US" sz="1087" b="0" i="0" u="none" strike="noStrike" cap="none" dirty="0">
+                <a:solidFill>
+                  <a:srgbClr val="B0BEC5"/>
+                </a:solidFill>
+                <a:latin typeface="Malgun Gothic"/>
+                <a:ea typeface="Malgun Gothic"/>
+                <a:cs typeface="Malgun Gothic"/>
+                <a:sym typeface="Malgun Gothic"/>
+              </a:rPr>
+              <a:t> </a:t>
+            </a:r>
+            <a:r>
+              <a:rPr lang="en-US" sz="1087" b="0" i="0" u="none" strike="noStrike" cap="none" dirty="0" err="1">
+                <a:solidFill>
+                  <a:srgbClr val="B0BEC5"/>
+                </a:solidFill>
+                <a:latin typeface="Malgun Gothic"/>
+                <a:ea typeface="Malgun Gothic"/>
+                <a:cs typeface="Malgun Gothic"/>
+                <a:sym typeface="Malgun Gothic"/>
+              </a:rPr>
+              <a:t>완벽히</a:t>
+            </a:r>
+            <a:r>
+              <a:rPr lang="en-US" sz="1087" b="0" i="0" u="none" strike="noStrike" cap="none" dirty="0">
+                <a:solidFill>
+                  <a:srgbClr val="B0BEC5"/>
+                </a:solidFill>
+                <a:latin typeface="Malgun Gothic"/>
+                <a:ea typeface="Malgun Gothic"/>
+                <a:cs typeface="Malgun Gothic"/>
+                <a:sym typeface="Malgun Gothic"/>
+              </a:rPr>
+              <a:t> </a:t>
+            </a:r>
+            <a:r>
+              <a:rPr lang="en-US" sz="1087" b="0" i="0" u="none" strike="noStrike" cap="none" dirty="0" err="1">
+                <a:solidFill>
+                  <a:srgbClr val="B0BEC5"/>
+                </a:solidFill>
+                <a:latin typeface="Malgun Gothic"/>
+                <a:ea typeface="Malgun Gothic"/>
+                <a:cs typeface="Malgun Gothic"/>
+                <a:sym typeface="Malgun Gothic"/>
+              </a:rPr>
+              <a:t>분리했습니다</a:t>
+            </a:r>
+            <a:r>
+              <a:rPr lang="en-US" sz="1087" b="0" i="0" u="none" strike="noStrike" cap="none" dirty="0">
+                <a:solidFill>
+                  <a:srgbClr val="B0BEC5"/>
+                </a:solidFill>
+                <a:latin typeface="Malgun Gothic"/>
+                <a:ea typeface="Malgun Gothic"/>
+                <a:cs typeface="Malgun Gothic"/>
+                <a:sym typeface="Malgun Gothic"/>
+              </a:rPr>
+              <a:t>. </a:t>
+            </a:r>
+            <a:r>
+              <a:rPr lang="en-US" sz="1087" b="0" i="0" u="none" strike="noStrike" cap="none" dirty="0" err="1">
+                <a:solidFill>
+                  <a:srgbClr val="B0BEC5"/>
+                </a:solidFill>
+                <a:latin typeface="Malgun Gothic"/>
+                <a:ea typeface="Malgun Gothic"/>
+                <a:cs typeface="Malgun Gothic"/>
+                <a:sym typeface="Malgun Gothic"/>
+              </a:rPr>
+              <a:t>코드는</a:t>
+            </a:r>
+            <a:r>
+              <a:rPr lang="en-US" sz="1087" b="0" i="0" u="none" strike="noStrike" cap="none" dirty="0">
+                <a:solidFill>
+                  <a:srgbClr val="B0BEC5"/>
+                </a:solidFill>
+                <a:latin typeface="Malgun Gothic"/>
+                <a:ea typeface="Malgun Gothic"/>
+                <a:cs typeface="Malgun Gothic"/>
+                <a:sym typeface="Malgun Gothic"/>
+              </a:rPr>
+              <a:t> </a:t>
+            </a:r>
+            <a:r>
+              <a:rPr lang="en-US" sz="1087" b="0" i="0" u="none" strike="noStrike" cap="none" dirty="0" err="1">
+                <a:solidFill>
+                  <a:srgbClr val="B0BEC5"/>
+                </a:solidFill>
+                <a:latin typeface="Malgun Gothic"/>
+                <a:ea typeface="Malgun Gothic"/>
+                <a:cs typeface="Malgun Gothic"/>
+                <a:sym typeface="Malgun Gothic"/>
+              </a:rPr>
+              <a:t>간결하게</a:t>
+            </a:r>
+            <a:r>
+              <a:rPr lang="en-US" sz="1087" b="0" i="0" u="none" strike="noStrike" cap="none" dirty="0">
+                <a:solidFill>
+                  <a:srgbClr val="B0BEC5"/>
+                </a:solidFill>
+                <a:latin typeface="Malgun Gothic"/>
+                <a:ea typeface="Malgun Gothic"/>
+                <a:cs typeface="Malgun Gothic"/>
+                <a:sym typeface="Malgun Gothic"/>
+              </a:rPr>
+              <a:t> </a:t>
+            </a:r>
+            <a:r>
+              <a:rPr lang="en-US" sz="1087" b="0" i="0" u="none" strike="noStrike" cap="none" dirty="0" err="1">
+                <a:solidFill>
+                  <a:srgbClr val="B0BEC5"/>
+                </a:solidFill>
+                <a:latin typeface="Malgun Gothic"/>
+                <a:ea typeface="Malgun Gothic"/>
+                <a:cs typeface="Malgun Gothic"/>
+                <a:sym typeface="Malgun Gothic"/>
+              </a:rPr>
+              <a:t>유지하면서</a:t>
+            </a:r>
+            <a:r>
+              <a:rPr lang="en-US" sz="1087" b="0" i="0" u="none" strike="noStrike" cap="none" dirty="0">
+                <a:solidFill>
+                  <a:srgbClr val="B0BEC5"/>
+                </a:solidFill>
+                <a:latin typeface="Malgun Gothic"/>
+                <a:ea typeface="Malgun Gothic"/>
+                <a:cs typeface="Malgun Gothic"/>
+                <a:sym typeface="Malgun Gothic"/>
+              </a:rPr>
+              <a:t> </a:t>
+            </a:r>
+            <a:r>
+              <a:rPr lang="en-US" sz="1087" b="0" i="0" u="none" strike="noStrike" cap="none" dirty="0" err="1">
+                <a:solidFill>
+                  <a:srgbClr val="B0BEC5"/>
+                </a:solidFill>
+                <a:latin typeface="Malgun Gothic"/>
+                <a:ea typeface="Malgun Gothic"/>
+                <a:cs typeface="Malgun Gothic"/>
+                <a:sym typeface="Malgun Gothic"/>
+              </a:rPr>
+              <a:t>안내</a:t>
+            </a:r>
+            <a:r>
+              <a:rPr lang="en-US" sz="1087" b="0" i="0" u="none" strike="noStrike" cap="none" dirty="0">
+                <a:solidFill>
+                  <a:srgbClr val="B0BEC5"/>
+                </a:solidFill>
+                <a:latin typeface="Malgun Gothic"/>
+                <a:ea typeface="Malgun Gothic"/>
+                <a:cs typeface="Malgun Gothic"/>
+                <a:sym typeface="Malgun Gothic"/>
+              </a:rPr>
+              <a:t> </a:t>
+            </a:r>
+            <a:r>
+              <a:rPr lang="en-US" sz="1087" b="0" i="0" u="none" strike="noStrike" cap="none" dirty="0" err="1">
+                <a:solidFill>
+                  <a:srgbClr val="B0BEC5"/>
+                </a:solidFill>
+                <a:latin typeface="Malgun Gothic"/>
+                <a:ea typeface="Malgun Gothic"/>
+                <a:cs typeface="Malgun Gothic"/>
+                <a:sym typeface="Malgun Gothic"/>
+              </a:rPr>
+              <a:t>모드와</a:t>
+            </a:r>
+            <a:r>
+              <a:rPr lang="en-US" sz="1087" b="0" i="0" u="none" strike="noStrike" cap="none" dirty="0">
+                <a:solidFill>
+                  <a:srgbClr val="B0BEC5"/>
+                </a:solidFill>
+                <a:latin typeface="Malgun Gothic"/>
+                <a:ea typeface="Malgun Gothic"/>
+                <a:cs typeface="Malgun Gothic"/>
+                <a:sym typeface="Malgun Gothic"/>
+              </a:rPr>
+              <a:t> </a:t>
+            </a:r>
+            <a:r>
+              <a:rPr lang="en-US" sz="1087" b="0" i="0" u="none" strike="noStrike" cap="none" dirty="0" err="1">
+                <a:solidFill>
+                  <a:srgbClr val="B0BEC5"/>
+                </a:solidFill>
+                <a:latin typeface="Malgun Gothic"/>
+                <a:ea typeface="Malgun Gothic"/>
+                <a:cs typeface="Malgun Gothic"/>
+                <a:sym typeface="Malgun Gothic"/>
+              </a:rPr>
+              <a:t>주행</a:t>
+            </a:r>
+            <a:r>
+              <a:rPr lang="en-US" sz="1087" b="0" i="0" u="none" strike="noStrike" cap="none" dirty="0">
+                <a:solidFill>
+                  <a:srgbClr val="B0BEC5"/>
+                </a:solidFill>
+                <a:latin typeface="Malgun Gothic"/>
+                <a:ea typeface="Malgun Gothic"/>
+                <a:cs typeface="Malgun Gothic"/>
+                <a:sym typeface="Malgun Gothic"/>
+              </a:rPr>
+              <a:t> </a:t>
+            </a:r>
+            <a:r>
+              <a:rPr lang="en-US" sz="1087" b="0" i="0" u="none" strike="noStrike" cap="none" dirty="0" err="1">
+                <a:solidFill>
+                  <a:srgbClr val="B0BEC5"/>
+                </a:solidFill>
+                <a:latin typeface="Malgun Gothic"/>
+                <a:ea typeface="Malgun Gothic"/>
+                <a:cs typeface="Malgun Gothic"/>
+                <a:sym typeface="Malgun Gothic"/>
+              </a:rPr>
+              <a:t>모드의</a:t>
+            </a:r>
+            <a:r>
+              <a:rPr lang="en-US" sz="1087" b="0" i="0" u="none" strike="noStrike" cap="none" dirty="0">
+                <a:solidFill>
+                  <a:srgbClr val="B0BEC5"/>
+                </a:solidFill>
+                <a:latin typeface="Malgun Gothic"/>
+                <a:ea typeface="Malgun Gothic"/>
+                <a:cs typeface="Malgun Gothic"/>
+                <a:sym typeface="Malgun Gothic"/>
+              </a:rPr>
+              <a:t> 100% </a:t>
+            </a:r>
+            <a:r>
+              <a:rPr lang="en-US" sz="1087" b="0" i="0" u="none" strike="noStrike" cap="none" dirty="0" err="1">
+                <a:solidFill>
+                  <a:srgbClr val="B0BEC5"/>
+                </a:solidFill>
+                <a:latin typeface="Malgun Gothic"/>
+                <a:ea typeface="Malgun Gothic"/>
+                <a:cs typeface="Malgun Gothic"/>
+                <a:sym typeface="Malgun Gothic"/>
+              </a:rPr>
+              <a:t>다른</a:t>
+            </a:r>
+            <a:r>
+              <a:rPr lang="en-US" sz="1087" b="0" i="0" u="none" strike="noStrike" cap="none" dirty="0">
+                <a:solidFill>
+                  <a:srgbClr val="B0BEC5"/>
+                </a:solidFill>
+                <a:latin typeface="Malgun Gothic"/>
+                <a:ea typeface="Malgun Gothic"/>
+                <a:cs typeface="Malgun Gothic"/>
+                <a:sym typeface="Malgun Gothic"/>
+              </a:rPr>
+              <a:t> </a:t>
+            </a:r>
+            <a:r>
+              <a:rPr lang="en-US" sz="1087" b="0" i="0" u="none" strike="noStrike" cap="none" dirty="0" err="1">
+                <a:solidFill>
+                  <a:srgbClr val="B0BEC5"/>
+                </a:solidFill>
+                <a:latin typeface="Malgun Gothic"/>
+                <a:ea typeface="Malgun Gothic"/>
+                <a:cs typeface="Malgun Gothic"/>
+                <a:sym typeface="Malgun Gothic"/>
+              </a:rPr>
+              <a:t>주행</a:t>
+            </a:r>
+            <a:r>
+              <a:rPr lang="en-US" sz="1087" b="0" i="0" u="none" strike="noStrike" cap="none" dirty="0">
+                <a:solidFill>
+                  <a:srgbClr val="B0BEC5"/>
+                </a:solidFill>
+                <a:latin typeface="Malgun Gothic"/>
+                <a:ea typeface="Malgun Gothic"/>
+                <a:cs typeface="Malgun Gothic"/>
+                <a:sym typeface="Malgun Gothic"/>
+              </a:rPr>
+              <a:t> </a:t>
+            </a:r>
+            <a:r>
+              <a:rPr lang="en-US" sz="1087" b="0" i="0" u="none" strike="noStrike" cap="none" dirty="0" err="1">
+                <a:solidFill>
+                  <a:srgbClr val="B0BEC5"/>
+                </a:solidFill>
+                <a:latin typeface="Malgun Gothic"/>
+                <a:ea typeface="Malgun Gothic"/>
+                <a:cs typeface="Malgun Gothic"/>
+                <a:sym typeface="Malgun Gothic"/>
+              </a:rPr>
+              <a:t>특성을</a:t>
+            </a:r>
+            <a:r>
+              <a:rPr lang="en-US" sz="1087" b="0" i="0" u="none" strike="noStrike" cap="none" dirty="0">
+                <a:solidFill>
+                  <a:srgbClr val="B0BEC5"/>
+                </a:solidFill>
+                <a:latin typeface="Malgun Gothic"/>
+                <a:ea typeface="Malgun Gothic"/>
+                <a:cs typeface="Malgun Gothic"/>
+                <a:sym typeface="Malgun Gothic"/>
+              </a:rPr>
+              <a:t> </a:t>
+            </a:r>
+            <a:r>
+              <a:rPr lang="en-US" sz="1087" b="0" i="0" u="none" strike="noStrike" cap="none" dirty="0" err="1">
+                <a:solidFill>
+                  <a:srgbClr val="B0BEC5"/>
+                </a:solidFill>
+                <a:latin typeface="Malgun Gothic"/>
+                <a:ea typeface="Malgun Gothic"/>
+                <a:cs typeface="Malgun Gothic"/>
+                <a:sym typeface="Malgun Gothic"/>
+              </a:rPr>
+              <a:t>구현했습니다</a:t>
+            </a:r>
+            <a:r>
+              <a:rPr lang="en-US" sz="1087" b="0" i="0" u="none" strike="noStrike" cap="none" dirty="0">
+                <a:solidFill>
+                  <a:srgbClr val="B0BEC5"/>
+                </a:solidFill>
+                <a:latin typeface="Malgun Gothic"/>
+                <a:ea typeface="Malgun Gothic"/>
+                <a:cs typeface="Malgun Gothic"/>
+                <a:sym typeface="Malgun Gothic"/>
+              </a:rPr>
+              <a:t>.</a:t>
+            </a:r>
+            <a:endParaRPr dirty="0"/>
           </a:p>
         </p:txBody>
       </p:sp>
@@ -13089,7 +13977,7 @@
         </p:blipFill>
         <p:spPr>
           <a:xfrm>
-            <a:off x="485775" y="1814512"/>
+            <a:off x="485776" y="1854100"/>
             <a:ext cx="2662237" cy="447675"/>
           </a:xfrm>
           <a:prstGeom prst="rect">
@@ -13242,54 +14130,6 @@
           </a:p>
         </p:txBody>
       </p:sp>
-      <p:sp>
-        <p:nvSpPr>
-          <p:cNvPr id="148" name="Google Shape;148;p14"/>
-          <p:cNvSpPr/>
-          <p:nvPr/>
-        </p:nvSpPr>
-        <p:spPr>
-          <a:xfrm>
-            <a:off x="3338512" y="3688258"/>
-            <a:ext cx="2662237" cy="38100"/>
-          </a:xfrm>
-          <a:prstGeom prst="rect">
-            <a:avLst/>
-          </a:prstGeom>
-          <a:solidFill>
-            <a:srgbClr val="00C8FF"/>
-          </a:solidFill>
-          <a:ln>
-            <a:noFill/>
-          </a:ln>
-        </p:spPr>
-        <p:txBody>
-          <a:bodyPr spcFirstLastPara="1" wrap="square" lIns="91425" tIns="45700" rIns="91425" bIns="45700" anchor="ctr" anchorCtr="0">
-            <a:noAutofit/>
-          </a:bodyPr>
-          <a:lstStyle/>
-          <a:p>
-            <a:pPr marL="0" marR="0" lvl="0" indent="0" algn="ctr" rtl="0">
-              <a:spcBef>
-                <a:spcPts val="0"/>
-              </a:spcBef>
-              <a:spcAft>
-                <a:spcPts val="0"/>
-              </a:spcAft>
-              <a:buNone/>
-            </a:pPr>
-            <a:endParaRPr sz="1800" b="0" i="0" u="none" strike="noStrike" cap="none">
-              <a:solidFill>
-                <a:schemeClr val="dk1"/>
-              </a:solidFill>
-              <a:latin typeface="Calibri"/>
-              <a:ea typeface="Calibri"/>
-              <a:cs typeface="Calibri"/>
-              <a:sym typeface="Calibri"/>
-            </a:endParaRPr>
-          </a:p>
-        </p:txBody>
-      </p:sp>
       <p:pic>
         <p:nvPicPr>
           <p:cNvPr id="149" name="Google Shape;149;p14" descr="image.png"/>
@@ -13305,7 +14145,7 @@
         </p:blipFill>
         <p:spPr>
           <a:xfrm>
-            <a:off x="3338512" y="1814512"/>
+            <a:off x="3319843" y="1854100"/>
             <a:ext cx="2662237" cy="447675"/>
           </a:xfrm>
           <a:prstGeom prst="rect">
@@ -13458,54 +14298,6 @@
           </a:p>
         </p:txBody>
       </p:sp>
-      <p:sp>
-        <p:nvSpPr>
-          <p:cNvPr id="152" name="Google Shape;152;p14"/>
-          <p:cNvSpPr/>
-          <p:nvPr/>
-        </p:nvSpPr>
-        <p:spPr>
-          <a:xfrm>
-            <a:off x="6191250" y="3688258"/>
-            <a:ext cx="2662237" cy="38100"/>
-          </a:xfrm>
-          <a:prstGeom prst="rect">
-            <a:avLst/>
-          </a:prstGeom>
-          <a:solidFill>
-            <a:srgbClr val="FFD600"/>
-          </a:solidFill>
-          <a:ln>
-            <a:noFill/>
-          </a:ln>
-        </p:spPr>
-        <p:txBody>
-          <a:bodyPr spcFirstLastPara="1" wrap="square" lIns="91425" tIns="45700" rIns="91425" bIns="45700" anchor="ctr" anchorCtr="0">
-            <a:noAutofit/>
-          </a:bodyPr>
-          <a:lstStyle/>
-          <a:p>
-            <a:pPr marL="0" marR="0" lvl="0" indent="0" algn="ctr" rtl="0">
-              <a:spcBef>
-                <a:spcPts val="0"/>
-              </a:spcBef>
-              <a:spcAft>
-                <a:spcPts val="0"/>
-              </a:spcAft>
-              <a:buNone/>
-            </a:pPr>
-            <a:endParaRPr sz="1800" b="0" i="0" u="none" strike="noStrike" cap="none">
-              <a:solidFill>
-                <a:schemeClr val="dk1"/>
-              </a:solidFill>
-              <a:latin typeface="Calibri"/>
-              <a:ea typeface="Calibri"/>
-              <a:cs typeface="Calibri"/>
-              <a:sym typeface="Calibri"/>
-            </a:endParaRPr>
-          </a:p>
-        </p:txBody>
-      </p:sp>
       <p:pic>
         <p:nvPicPr>
           <p:cNvPr id="153" name="Google Shape;153;p14" descr="image.png"/>
@@ -13521,7 +14313,7 @@
         </p:blipFill>
         <p:spPr>
           <a:xfrm>
-            <a:off x="6191250" y="1814512"/>
+            <a:off x="6181724" y="1854100"/>
             <a:ext cx="2662237" cy="447675"/>
           </a:xfrm>
           <a:prstGeom prst="rect">
@@ -13674,54 +14466,6 @@
           </a:p>
         </p:txBody>
       </p:sp>
-      <p:sp>
-        <p:nvSpPr>
-          <p:cNvPr id="156" name="Google Shape;156;p14"/>
-          <p:cNvSpPr/>
-          <p:nvPr/>
-        </p:nvSpPr>
-        <p:spPr>
-          <a:xfrm>
-            <a:off x="9043987" y="3688258"/>
-            <a:ext cx="2662237" cy="38100"/>
-          </a:xfrm>
-          <a:prstGeom prst="rect">
-            <a:avLst/>
-          </a:prstGeom>
-          <a:solidFill>
-            <a:srgbClr val="A78BFA"/>
-          </a:solidFill>
-          <a:ln>
-            <a:noFill/>
-          </a:ln>
-        </p:spPr>
-        <p:txBody>
-          <a:bodyPr spcFirstLastPara="1" wrap="square" lIns="91425" tIns="45700" rIns="91425" bIns="45700" anchor="ctr" anchorCtr="0">
-            <a:noAutofit/>
-          </a:bodyPr>
-          <a:lstStyle/>
-          <a:p>
-            <a:pPr marL="0" marR="0" lvl="0" indent="0" algn="ctr" rtl="0">
-              <a:spcBef>
-                <a:spcPts val="0"/>
-              </a:spcBef>
-              <a:spcAft>
-                <a:spcPts val="0"/>
-              </a:spcAft>
-              <a:buNone/>
-            </a:pPr>
-            <a:endParaRPr sz="1800" b="0" i="0" u="none" strike="noStrike" cap="none">
-              <a:solidFill>
-                <a:schemeClr val="dk1"/>
-              </a:solidFill>
-              <a:latin typeface="Calibri"/>
-              <a:ea typeface="Calibri"/>
-              <a:cs typeface="Calibri"/>
-              <a:sym typeface="Calibri"/>
-            </a:endParaRPr>
-          </a:p>
-        </p:txBody>
-      </p:sp>
       <p:pic>
         <p:nvPicPr>
           <p:cNvPr id="157" name="Google Shape;157;p14" descr="image.png"/>
@@ -13737,7 +14481,7 @@
         </p:blipFill>
         <p:spPr>
           <a:xfrm>
-            <a:off x="9043987" y="1814512"/>
+            <a:off x="9079705" y="1856779"/>
             <a:ext cx="2662237" cy="447675"/>
           </a:xfrm>
           <a:prstGeom prst="rect">
